--- a/presentations/b03-hr-identity/B03_HR_Identity.pptx
+++ b/presentations/b03-hr-identity/B03_HR_Identity.pptx
@@ -119,26 +119,26 @@
   <p:extLst>
     <p:ext uri="{521415D9-36F7-43E2-AB2F-B90AF26B5E84}">
       <p14:sectionLst xmlns:p14="http://schemas.microsoft.com/office/powerpoint/2010/main">
-        <p14:section name="Why HR decides" id="{061bd5de-7b01-c5f0-fc0a-9c938380a720}">
+        <p14:section name="Why HR decides" id="{3edd7c59-8318-fdd1-bbf8-20c4d34fc889}">
           <p14:sldIdLst>
             <p14:sldId id="256"/>
             <p14:sldId id="257"/>
             <p14:sldId id="258"/>
           </p14:sldIdLst>
         </p14:section>
-        <p14:section name="What we should do" id="{8c48b47d-6938-1039-3c60-072dad981e95}">
+        <p14:section name="What we should do" id="{90b6b281-e1b0-4b64-a21c-100967f343e3}">
           <p14:sldIdLst>
             <p14:sldId id="259"/>
             <p14:sldId id="260"/>
             <p14:sldId id="261"/>
           </p14:sldIdLst>
         </p14:section>
-        <p14:section name="Who owns it" id="{2c4d6fe0-e4f0-1d19-ddf1-1f90a3afb502}">
+        <p14:section name="Who owns it" id="{a8a206a4-3b33-4af1-3e4c-823c2e912c4e}">
           <p14:sldIdLst>
             <p14:sldId id="262"/>
           </p14:sldIdLst>
         </p14:section>
-        <p14:section name="How to do it" id="{2608a724-a362-ba3a-3807-b751ea46ec09}">
+        <p14:section name="How to do it" id="{13cd08ca-5afb-6881-4ab9-b3bb02bf7be2}">
           <p14:sldIdLst>
             <p14:sldId id="263"/>
             <p14:sldId id="264"/>
@@ -146,7 +146,7 @@
             <p14:sldId id="266"/>
           </p14:sldIdLst>
         </p14:section>
-        <p14:section name="Backup" id="{8ac1c2f8-8174-88e3-5fb4-19ba504e362e}">
+        <p14:section name="Backup" id="{fc1024e8-21a6-2722-c676-ddc6501bd909}">
           <p14:sldIdLst>
             <p14:sldId id="267"/>
             <p14:sldId id="268"/>
@@ -556,7 +556,7 @@
           <a:p>
             <a:r>
               <a:rPr lang="en-US" dirty="0"/>
-              <a:t>[0:00–0:30]  This briefing comes from Book 03 of the Modernization Workbook, HR-Driven Identity.
+              <a:t>[0:00–0:30]  This briefing comes from Book 03 of the Federal Modernization Workbook, HR-Driven Identity.
 It has one proposal, and I'll take it through four questions, the way I'd take it to leadership: why it matters, what we should do, who has to be involved, and how we'd carry it out and know it's working.
 Book 02 made the case that identity is now where every access decision is made. This book asks where the facts behind that identity should come from. The answer is the HR system of record, starting now.
 Workbook: Book 03, index and Chapter 01.</a:t>
@@ -1953,7 +1953,7 @@
                   <a:schemeClr val="accent5"/>
                 </a:solidFill>
               </a:rPr>
-              <a:t>Modernization Workbook  ·  Book 03 HR-Driven Identity</a:t>
+              <a:t>Federal Modernization Workbook  ·  Book 03 HR-Driven Identity</a:t>
             </a:r>
             <a:endParaRPr lang="en-US" sz="1000" dirty="0"/>
           </a:p>
@@ -2434,7 +2434,90 @@
       </p:sp>
       <p:sp>
         <p:nvSpPr>
-          <p:cNvPr id="4" name="Agenda line"/>
+          <p:cNvPr id="4" name="Presenter"/>
+          <p:cNvSpPr txBox="1"/>
+          <p:nvPr/>
+        </p:nvSpPr>
+        <p:spPr>
+          <a:xfrm>
+            <a:off x="731520" y="5897880"/>
+            <a:ext cx="6858000" cy="365760"/>
+          </a:xfrm>
+          <a:prstGeom prst="rect">
+            <a:avLst/>
+          </a:prstGeom>
+          <a:noFill/>
+          <a:ln/>
+        </p:spPr>
+        <p:txBody>
+          <a:bodyPr wrap="square" lIns="0" tIns="0" rIns="0" bIns="0" rtlCol="0" anchor="ctr"/>
+          <a:lstStyle/>
+          <a:p>
+            <a:pPr indent="0" marL="0">
+              <a:buNone/>
+            </a:pPr>
+            <a:r>
+              <a:rPr lang="en-US" sz="1600" dirty="0">
+                <a:solidFill>
+                  <a:srgbClr val="64748B"/>
+                </a:solidFill>
+              </a:rPr>
+              <a:t>Presented by  </a:t>
+            </a:r>
+            <a:pPr indent="0" marL="0">
+              <a:buNone/>
+            </a:pPr>
+            <a:r>
+              <a:rPr lang="en-US" sz="1600" b="1" dirty="0">
+                <a:solidFill>
+                  <a:srgbClr val="1F2A44"/>
+                </a:solidFill>
+              </a:rPr>
+              <a:t>Michael F. Stratton</a:t>
+            </a:r>
+            <a:endParaRPr lang="en-US" sz="1600" dirty="0"/>
+          </a:p>
+        </p:txBody>
+      </p:sp>
+      <p:sp>
+        <p:nvSpPr>
+          <p:cNvPr id="5" name="Disclaimer"/>
+          <p:cNvSpPr txBox="1"/>
+          <p:nvPr/>
+        </p:nvSpPr>
+        <p:spPr>
+          <a:xfrm>
+            <a:off x="731520" y="6309360"/>
+            <a:ext cx="8686800" cy="274320"/>
+          </a:xfrm>
+          <a:prstGeom prst="rect">
+            <a:avLst/>
+          </a:prstGeom>
+          <a:noFill/>
+          <a:ln/>
+        </p:spPr>
+        <p:txBody>
+          <a:bodyPr wrap="square" lIns="0" tIns="0" rIns="0" bIns="0" rtlCol="0" anchor="ctr"/>
+          <a:lstStyle/>
+          <a:p>
+            <a:pPr indent="0" marL="0">
+              <a:buNone/>
+            </a:pPr>
+            <a:r>
+              <a:rPr lang="en-US" sz="1050" dirty="0">
+                <a:solidFill>
+                  <a:srgbClr val="64748B"/>
+                </a:solidFill>
+              </a:rPr>
+              <a:t>Not an official U.S. government publication. Independent technical analysis; not reviewed or endorsed by any federal agency.</a:t>
+            </a:r>
+            <a:endParaRPr lang="en-US" sz="1050" dirty="0"/>
+          </a:p>
+        </p:txBody>
+      </p:sp>
+      <p:sp>
+        <p:nvSpPr>
+          <p:cNvPr id="6" name="Agenda line"/>
           <p:cNvSpPr txBox="1"/>
           <p:nvPr/>
         </p:nvSpPr>
@@ -2536,7 +2619,7 @@
       </p:sp>
       <p:sp>
         <p:nvSpPr>
-          <p:cNvPr id="5" name="Series line"/>
+          <p:cNvPr id="7" name="Series line"/>
           <p:cNvSpPr txBox="1"/>
           <p:nvPr/>
         </p:nvSpPr>
@@ -2564,7 +2647,7 @@
                   <a:srgbClr val="1F2A44"/>
                 </a:solidFill>
               </a:rPr>
-              <a:t>Modernization Workbook</a:t>
+              <a:t>Federal Modernization Workbook</a:t>
             </a:r>
             <a:endParaRPr lang="en-US" sz="1600" dirty="0"/>
           </a:p>
@@ -2652,7 +2735,13 @@
       </p:sp>
       <p:sp>
         <p:nvSpPr>
-          <p:cNvPr id="3" name="Tag How"/>
+          <p:cNvPr id="3" name="Tag How" descr="">
+            <a:extLst>
+              <a:ext uri="{C183D7F6-B498-43B3-948B-1728B52AA6E4}">
+                <adec:decorative xmlns:adec="http://schemas.microsoft.com/office/drawing/2017/decorative" val="1"/>
+              </a:ext>
+            </a:extLst>
+          </p:cNvPr>
           <p:cNvSpPr/>
           <p:nvPr/>
         </p:nvSpPr>
@@ -2715,7 +2804,13 @@
       </p:sp>
       <p:sp>
         <p:nvSpPr>
-          <p:cNvPr id="5" name="Phase 0"/>
+          <p:cNvPr id="5" name="Phase 0" descr="">
+            <a:extLst>
+              <a:ext uri="{C183D7F6-B498-43B3-948B-1728B52AA6E4}">
+                <adec:decorative xmlns:adec="http://schemas.microsoft.com/office/drawing/2017/decorative" val="1"/>
+              </a:ext>
+            </a:extLst>
+          </p:cNvPr>
           <p:cNvSpPr/>
           <p:nvPr/>
         </p:nvSpPr>
@@ -2802,7 +2897,13 @@
       </p:sp>
       <p:sp>
         <p:nvSpPr>
-          <p:cNvPr id="7" name="Phase 1"/>
+          <p:cNvPr id="7" name="Phase 1" descr="">
+            <a:extLst>
+              <a:ext uri="{C183D7F6-B498-43B3-948B-1728B52AA6E4}">
+                <adec:decorative xmlns:adec="http://schemas.microsoft.com/office/drawing/2017/decorative" val="1"/>
+              </a:ext>
+            </a:extLst>
+          </p:cNvPr>
           <p:cNvSpPr/>
           <p:nvPr/>
         </p:nvSpPr>
@@ -2889,7 +2990,13 @@
       </p:sp>
       <p:sp>
         <p:nvSpPr>
-          <p:cNvPr id="9" name="Phase 2"/>
+          <p:cNvPr id="9" name="Phase 2" descr="">
+            <a:extLst>
+              <a:ext uri="{C183D7F6-B498-43B3-948B-1728B52AA6E4}">
+                <adec:decorative xmlns:adec="http://schemas.microsoft.com/office/drawing/2017/decorative" val="1"/>
+              </a:ext>
+            </a:extLst>
+          </p:cNvPr>
           <p:cNvSpPr/>
           <p:nvPr/>
         </p:nvSpPr>
@@ -2976,7 +3083,13 @@
       </p:sp>
       <p:sp>
         <p:nvSpPr>
-          <p:cNvPr id="11" name="Phase 3"/>
+          <p:cNvPr id="11" name="Phase 3" descr="">
+            <a:extLst>
+              <a:ext uri="{C183D7F6-B498-43B3-948B-1728B52AA6E4}">
+                <adec:decorative xmlns:adec="http://schemas.microsoft.com/office/drawing/2017/decorative" val="1"/>
+              </a:ext>
+            </a:extLst>
+          </p:cNvPr>
           <p:cNvSpPr/>
           <p:nvPr/>
         </p:nvSpPr>
@@ -3063,7 +3176,13 @@
       </p:sp>
       <p:sp>
         <p:nvSpPr>
-          <p:cNvPr id="13" name="Phase 4"/>
+          <p:cNvPr id="13" name="Phase 4" descr="">
+            <a:extLst>
+              <a:ext uri="{C183D7F6-B498-43B3-948B-1728B52AA6E4}">
+                <adec:decorative xmlns:adec="http://schemas.microsoft.com/office/drawing/2017/decorative" val="1"/>
+              </a:ext>
+            </a:extLst>
+          </p:cNvPr>
           <p:cNvSpPr/>
           <p:nvPr/>
         </p:nvSpPr>
@@ -3150,7 +3269,13 @@
       </p:sp>
       <p:sp>
         <p:nvSpPr>
-          <p:cNvPr id="15" name="Phase 5"/>
+          <p:cNvPr id="15" name="Phase 5" descr="">
+            <a:extLst>
+              <a:ext uri="{C183D7F6-B498-43B3-948B-1728B52AA6E4}">
+                <adec:decorative xmlns:adec="http://schemas.microsoft.com/office/drawing/2017/decorative" val="1"/>
+              </a:ext>
+            </a:extLst>
+          </p:cNvPr>
           <p:cNvSpPr/>
           <p:nvPr/>
         </p:nvSpPr>
@@ -3237,7 +3362,13 @@
       </p:sp>
       <p:sp>
         <p:nvSpPr>
-          <p:cNvPr id="17" name="Phase 6"/>
+          <p:cNvPr id="17" name="Phase 6" descr="">
+            <a:extLst>
+              <a:ext uri="{C183D7F6-B498-43B3-948B-1728B52AA6E4}">
+                <adec:decorative xmlns:adec="http://schemas.microsoft.com/office/drawing/2017/decorative" val="1"/>
+              </a:ext>
+            </a:extLst>
+          </p:cNvPr>
           <p:cNvSpPr/>
           <p:nvPr/>
         </p:nvSpPr>
@@ -3418,7 +3549,13 @@
       </p:sp>
       <p:sp>
         <p:nvSpPr>
-          <p:cNvPr id="20" name="Gates"/>
+          <p:cNvPr id="20" name="Gates" descr="">
+            <a:extLst>
+              <a:ext uri="{C183D7F6-B498-43B3-948B-1728B52AA6E4}">
+                <adec:decorative xmlns:adec="http://schemas.microsoft.com/office/drawing/2017/decorative" val="1"/>
+              </a:ext>
+            </a:extLst>
+          </p:cNvPr>
           <p:cNvSpPr/>
           <p:nvPr/>
         </p:nvSpPr>
@@ -3452,7 +3589,13 @@
       </p:sp>
       <p:sp>
         <p:nvSpPr>
-          <p:cNvPr id="21" name="Icon FaClipboardCheck"/>
+          <p:cNvPr id="21" name="Icon FaClipboardCheck" descr="">
+            <a:extLst>
+              <a:ext uri="{C183D7F6-B498-43B3-948B-1728B52AA6E4}">
+                <adec:decorative xmlns:adec="http://schemas.microsoft.com/office/drawing/2017/decorative" val="1"/>
+              </a:ext>
+            </a:extLst>
+          </p:cNvPr>
           <p:cNvSpPr/>
           <p:nvPr/>
         </p:nvSpPr>
@@ -3477,7 +3620,13 @@
       </p:sp>
       <p:pic>
         <p:nvPicPr>
-          <p:cNvPr id="22" name="Image 0" descr="C:\Users\whale\git\mwb-b03\presentations\_build\icons\FaClipboardCheck.png">    </p:cNvPr>
+          <p:cNvPr id="22" name="Image 0" descr="">
+            <a:extLst>
+              <a:ext uri="{C183D7F6-B498-43B3-948B-1728B52AA6E4}">
+                <adec:decorative xmlns:adec="http://schemas.microsoft.com/office/drawing/2017/decorative" val="1"/>
+              </a:ext>
+            </a:extLst>
+          </p:cNvPr>
           <p:cNvPicPr>
             <a:picLocks noChangeAspect="1"/>
           </p:cNvPicPr>
@@ -3695,7 +3844,13 @@
       </p:sp>
       <p:sp>
         <p:nvSpPr>
-          <p:cNvPr id="3" name="Tag How"/>
+          <p:cNvPr id="3" name="Tag How" descr="">
+            <a:extLst>
+              <a:ext uri="{C183D7F6-B498-43B3-948B-1728B52AA6E4}">
+                <adec:decorative xmlns:adec="http://schemas.microsoft.com/office/drawing/2017/decorative" val="1"/>
+              </a:ext>
+            </a:extLst>
+          </p:cNvPr>
           <p:cNvSpPr/>
           <p:nvPr/>
         </p:nvSpPr>
@@ -3906,7 +4061,13 @@
       </p:sp>
       <p:sp>
         <p:nvSpPr>
-          <p:cNvPr id="7" name="Ask box"/>
+          <p:cNvPr id="7" name="Ask box" descr="">
+            <a:extLst>
+              <a:ext uri="{C183D7F6-B498-43B3-948B-1728B52AA6E4}">
+                <adec:decorative xmlns:adec="http://schemas.microsoft.com/office/drawing/2017/decorative" val="1"/>
+              </a:ext>
+            </a:extLst>
+          </p:cNvPr>
           <p:cNvSpPr/>
           <p:nvPr/>
         </p:nvSpPr>
@@ -3940,7 +4101,13 @@
       </p:sp>
       <p:sp>
         <p:nvSpPr>
-          <p:cNvPr id="8" name="Icon FaUserCheck"/>
+          <p:cNvPr id="8" name="Icon FaUserCheck" descr="">
+            <a:extLst>
+              <a:ext uri="{C183D7F6-B498-43B3-948B-1728B52AA6E4}">
+                <adec:decorative xmlns:adec="http://schemas.microsoft.com/office/drawing/2017/decorative" val="1"/>
+              </a:ext>
+            </a:extLst>
+          </p:cNvPr>
           <p:cNvSpPr/>
           <p:nvPr/>
         </p:nvSpPr>
@@ -3965,7 +4132,13 @@
       </p:sp>
       <p:pic>
         <p:nvPicPr>
-          <p:cNvPr id="9" name="Image 0" descr="C:\Users\whale\git\mwb-b03\presentations\_build\icons\FaUserCheck.png">    </p:cNvPr>
+          <p:cNvPr id="9" name="Image 0" descr="">
+            <a:extLst>
+              <a:ext uri="{C183D7F6-B498-43B3-948B-1728B52AA6E4}">
+                <adec:decorative xmlns:adec="http://schemas.microsoft.com/office/drawing/2017/decorative" val="1"/>
+              </a:ext>
+            </a:extLst>
+          </p:cNvPr>
           <p:cNvPicPr>
             <a:picLocks noChangeAspect="1"/>
           </p:cNvPicPr>
@@ -4139,7 +4312,13 @@
       </p:sp>
       <p:sp>
         <p:nvSpPr>
-          <p:cNvPr id="12" name="Next"/>
+          <p:cNvPr id="12" name="Next" descr="">
+            <a:extLst>
+              <a:ext uri="{C183D7F6-B498-43B3-948B-1728B52AA6E4}">
+                <adec:decorative xmlns:adec="http://schemas.microsoft.com/office/drawing/2017/decorative" val="1"/>
+              </a:ext>
+            </a:extLst>
+          </p:cNvPr>
           <p:cNvSpPr/>
           <p:nvPr/>
         </p:nvSpPr>
@@ -4173,7 +4352,13 @@
       </p:sp>
       <p:sp>
         <p:nvSpPr>
-          <p:cNvPr id="13" name="Icon FaBook"/>
+          <p:cNvPr id="13" name="Icon FaBook" descr="">
+            <a:extLst>
+              <a:ext uri="{C183D7F6-B498-43B3-948B-1728B52AA6E4}">
+                <adec:decorative xmlns:adec="http://schemas.microsoft.com/office/drawing/2017/decorative" val="1"/>
+              </a:ext>
+            </a:extLst>
+          </p:cNvPr>
           <p:cNvSpPr/>
           <p:nvPr/>
         </p:nvSpPr>
@@ -4198,7 +4383,13 @@
       </p:sp>
       <p:pic>
         <p:nvPicPr>
-          <p:cNvPr id="14" name="Image 1" descr="C:\Users\whale\git\mwb-b03\presentations\_build\icons\FaBook.png">    </p:cNvPr>
+          <p:cNvPr id="14" name="Image 1" descr="">
+            <a:extLst>
+              <a:ext uri="{C183D7F6-B498-43B3-948B-1728B52AA6E4}">
+                <adec:decorative xmlns:adec="http://schemas.microsoft.com/office/drawing/2017/decorative" val="1"/>
+              </a:ext>
+            </a:extLst>
+          </p:cNvPr>
           <p:cNvPicPr>
             <a:picLocks noChangeAspect="1"/>
           </p:cNvPicPr>
@@ -4822,7 +5013,13 @@
       </p:sp>
       <p:sp>
         <p:nvSpPr>
-          <p:cNvPr id="3" name="Tag Why"/>
+          <p:cNvPr id="3" name="Tag Why" descr="">
+            <a:extLst>
+              <a:ext uri="{C183D7F6-B498-43B3-948B-1728B52AA6E4}">
+                <adec:decorative xmlns:adec="http://schemas.microsoft.com/office/drawing/2017/decorative" val="1"/>
+              </a:ext>
+            </a:extLst>
+          </p:cNvPr>
           <p:cNvSpPr/>
           <p:nvPr/>
         </p:nvSpPr>
@@ -4921,7 +5118,13 @@
       </p:sp>
       <p:sp>
         <p:nvSpPr>
-          <p:cNvPr id="6" name="Icon FaUserXmark"/>
+          <p:cNvPr id="6" name="Icon FaUserXmark" descr="">
+            <a:extLst>
+              <a:ext uri="{C183D7F6-B498-43B3-948B-1728B52AA6E4}">
+                <adec:decorative xmlns:adec="http://schemas.microsoft.com/office/drawing/2017/decorative" val="1"/>
+              </a:ext>
+            </a:extLst>
+          </p:cNvPr>
           <p:cNvSpPr/>
           <p:nvPr/>
         </p:nvSpPr>
@@ -4946,7 +5149,13 @@
       </p:sp>
       <p:pic>
         <p:nvPicPr>
-          <p:cNvPr id="7" name="Image 0" descr="C:\Users\whale\git\mwb-b03\presentations\_build\icons\FaUserXmark.png">    </p:cNvPr>
+          <p:cNvPr id="7" name="Image 0" descr="">
+            <a:extLst>
+              <a:ext uri="{C183D7F6-B498-43B3-948B-1728B52AA6E4}">
+                <adec:decorative xmlns:adec="http://schemas.microsoft.com/office/drawing/2017/decorative" val="1"/>
+              </a:ext>
+            </a:extLst>
+          </p:cNvPr>
           <p:cNvPicPr>
             <a:picLocks noChangeAspect="1"/>
           </p:cNvPicPr>
@@ -5020,7 +5229,13 @@
       </p:sp>
       <p:sp>
         <p:nvSpPr>
-          <p:cNvPr id="9" name="Icon FaAddressBook"/>
+          <p:cNvPr id="9" name="Icon FaAddressBook" descr="">
+            <a:extLst>
+              <a:ext uri="{C183D7F6-B498-43B3-948B-1728B52AA6E4}">
+                <adec:decorative xmlns:adec="http://schemas.microsoft.com/office/drawing/2017/decorative" val="1"/>
+              </a:ext>
+            </a:extLst>
+          </p:cNvPr>
           <p:cNvSpPr/>
           <p:nvPr/>
         </p:nvSpPr>
@@ -5045,7 +5260,13 @@
       </p:sp>
       <p:pic>
         <p:nvPicPr>
-          <p:cNvPr id="10" name="Image 1" descr="C:\Users\whale\git\mwb-b03\presentations\_build\icons\FaAddressBook.png">    </p:cNvPr>
+          <p:cNvPr id="10" name="Image 1" descr="">
+            <a:extLst>
+              <a:ext uri="{C183D7F6-B498-43B3-948B-1728B52AA6E4}">
+                <adec:decorative xmlns:adec="http://schemas.microsoft.com/office/drawing/2017/decorative" val="1"/>
+              </a:ext>
+            </a:extLst>
+          </p:cNvPr>
           <p:cNvPicPr>
             <a:picLocks noChangeAspect="1"/>
           </p:cNvPicPr>
@@ -5119,7 +5340,13 @@
       </p:sp>
       <p:sp>
         <p:nvSpPr>
-          <p:cNvPr id="12" name="Icon FaUserClock"/>
+          <p:cNvPr id="12" name="Icon FaUserClock" descr="">
+            <a:extLst>
+              <a:ext uri="{C183D7F6-B498-43B3-948B-1728B52AA6E4}">
+                <adec:decorative xmlns:adec="http://schemas.microsoft.com/office/drawing/2017/decorative" val="1"/>
+              </a:ext>
+            </a:extLst>
+          </p:cNvPr>
           <p:cNvSpPr/>
           <p:nvPr/>
         </p:nvSpPr>
@@ -5144,7 +5371,13 @@
       </p:sp>
       <p:pic>
         <p:nvPicPr>
-          <p:cNvPr id="13" name="Image 2" descr="C:\Users\whale\git\mwb-b03\presentations\_build\icons\FaUserClock.png">    </p:cNvPr>
+          <p:cNvPr id="13" name="Image 2" descr="">
+            <a:extLst>
+              <a:ext uri="{C183D7F6-B498-43B3-948B-1728B52AA6E4}">
+                <adec:decorative xmlns:adec="http://schemas.microsoft.com/office/drawing/2017/decorative" val="1"/>
+              </a:ext>
+            </a:extLst>
+          </p:cNvPr>
           <p:cNvPicPr>
             <a:picLocks noChangeAspect="1"/>
           </p:cNvPicPr>
@@ -5218,7 +5451,13 @@
       </p:sp>
       <p:sp>
         <p:nvSpPr>
-          <p:cNvPr id="15" name="Token box"/>
+          <p:cNvPr id="15" name="Token box" descr="">
+            <a:extLst>
+              <a:ext uri="{C183D7F6-B498-43B3-948B-1728B52AA6E4}">
+                <adec:decorative xmlns:adec="http://schemas.microsoft.com/office/drawing/2017/decorative" val="1"/>
+              </a:ext>
+            </a:extLst>
+          </p:cNvPr>
           <p:cNvSpPr/>
           <p:nvPr/>
         </p:nvSpPr>
@@ -5252,7 +5491,13 @@
       </p:sp>
       <p:sp>
         <p:nvSpPr>
-          <p:cNvPr id="16" name="Icon FaIdCard"/>
+          <p:cNvPr id="16" name="Icon FaIdCard" descr="">
+            <a:extLst>
+              <a:ext uri="{C183D7F6-B498-43B3-948B-1728B52AA6E4}">
+                <adec:decorative xmlns:adec="http://schemas.microsoft.com/office/drawing/2017/decorative" val="1"/>
+              </a:ext>
+            </a:extLst>
+          </p:cNvPr>
           <p:cNvSpPr/>
           <p:nvPr/>
         </p:nvSpPr>
@@ -5277,7 +5522,13 @@
       </p:sp>
       <p:pic>
         <p:nvPicPr>
-          <p:cNvPr id="17" name="Image 3" descr="C:\Users\whale\git\mwb-b03\presentations\_build\icons\FaIdCard.png">    </p:cNvPr>
+          <p:cNvPr id="17" name="Image 3" descr="">
+            <a:extLst>
+              <a:ext uri="{C183D7F6-B498-43B3-948B-1728B52AA6E4}">
+                <adec:decorative xmlns:adec="http://schemas.microsoft.com/office/drawing/2017/decorative" val="1"/>
+              </a:ext>
+            </a:extLst>
+          </p:cNvPr>
           <p:cNvPicPr>
             <a:picLocks noChangeAspect="1"/>
           </p:cNvPicPr>
@@ -5466,7 +5717,13 @@
       </p:sp>
       <p:sp>
         <p:nvSpPr>
-          <p:cNvPr id="21" name="Do nothing"/>
+          <p:cNvPr id="21" name="Do nothing" descr="">
+            <a:extLst>
+              <a:ext uri="{C183D7F6-B498-43B3-948B-1728B52AA6E4}">
+                <adec:decorative xmlns:adec="http://schemas.microsoft.com/office/drawing/2017/decorative" val="1"/>
+              </a:ext>
+            </a:extLst>
+          </p:cNvPr>
           <p:cNvSpPr/>
           <p:nvPr/>
         </p:nvSpPr>
@@ -5500,7 +5757,13 @@
       </p:sp>
       <p:sp>
         <p:nvSpPr>
-          <p:cNvPr id="22" name="Icon FaTriangleExclamation"/>
+          <p:cNvPr id="22" name="Icon FaTriangleExclamation" descr="">
+            <a:extLst>
+              <a:ext uri="{C183D7F6-B498-43B3-948B-1728B52AA6E4}">
+                <adec:decorative xmlns:adec="http://schemas.microsoft.com/office/drawing/2017/decorative" val="1"/>
+              </a:ext>
+            </a:extLst>
+          </p:cNvPr>
           <p:cNvSpPr/>
           <p:nvPr/>
         </p:nvSpPr>
@@ -5525,7 +5788,13 @@
       </p:sp>
       <p:pic>
         <p:nvPicPr>
-          <p:cNvPr id="23" name="Image 4" descr="C:\Users\whale\git\mwb-b03\presentations\_build\icons\FaTriangleExclamation.png">    </p:cNvPr>
+          <p:cNvPr id="23" name="Image 4" descr="">
+            <a:extLst>
+              <a:ext uri="{C183D7F6-B498-43B3-948B-1728B52AA6E4}">
+                <adec:decorative xmlns:adec="http://schemas.microsoft.com/office/drawing/2017/decorative" val="1"/>
+              </a:ext>
+            </a:extLst>
+          </p:cNvPr>
           <p:cNvPicPr>
             <a:picLocks noChangeAspect="1"/>
           </p:cNvPicPr>
@@ -5743,7 +6012,13 @@
       </p:sp>
       <p:sp>
         <p:nvSpPr>
-          <p:cNvPr id="3" name="Tag Why"/>
+          <p:cNvPr id="3" name="Tag Why" descr="">
+            <a:extLst>
+              <a:ext uri="{C183D7F6-B498-43B3-948B-1728B52AA6E4}">
+                <adec:decorative xmlns:adec="http://schemas.microsoft.com/office/drawing/2017/decorative" val="1"/>
+              </a:ext>
+            </a:extLst>
+          </p:cNvPr>
           <p:cNvSpPr/>
           <p:nvPr/>
         </p:nvSpPr>
@@ -5806,7 +6081,13 @@
       </p:sp>
       <p:sp>
         <p:nvSpPr>
-          <p:cNvPr id="5" name="Col 0"/>
+          <p:cNvPr id="5" name="Col 0" descr="">
+            <a:extLst>
+              <a:ext uri="{C183D7F6-B498-43B3-948B-1728B52AA6E4}">
+                <adec:decorative xmlns:adec="http://schemas.microsoft.com/office/drawing/2017/decorative" val="1"/>
+              </a:ext>
+            </a:extLst>
+          </p:cNvPr>
           <p:cNvSpPr/>
           <p:nvPr/>
         </p:nvSpPr>
@@ -5840,7 +6121,13 @@
       </p:sp>
       <p:sp>
         <p:nvSpPr>
-          <p:cNvPr id="6" name="Icon FaBuildingColumns"/>
+          <p:cNvPr id="6" name="Icon FaBuildingColumns" descr="">
+            <a:extLst>
+              <a:ext uri="{C183D7F6-B498-43B3-948B-1728B52AA6E4}">
+                <adec:decorative xmlns:adec="http://schemas.microsoft.com/office/drawing/2017/decorative" val="1"/>
+              </a:ext>
+            </a:extLst>
+          </p:cNvPr>
           <p:cNvSpPr/>
           <p:nvPr/>
         </p:nvSpPr>
@@ -5865,7 +6152,13 @@
       </p:sp>
       <p:pic>
         <p:nvPicPr>
-          <p:cNvPr id="7" name="Image 0" descr="C:\Users\whale\git\mwb-b03\presentations\_build\icons\FaBuildingColumns.png">    </p:cNvPr>
+          <p:cNvPr id="7" name="Image 0" descr="">
+            <a:extLst>
+              <a:ext uri="{C183D7F6-B498-43B3-948B-1728B52AA6E4}">
+                <adec:decorative xmlns:adec="http://schemas.microsoft.com/office/drawing/2017/decorative" val="1"/>
+              </a:ext>
+            </a:extLst>
+          </p:cNvPr>
           <p:cNvPicPr>
             <a:picLocks noChangeAspect="1"/>
           </p:cNvPicPr>
@@ -6004,7 +6297,13 @@
       </p:sp>
       <p:sp>
         <p:nvSpPr>
-          <p:cNvPr id="10" name="Col 1"/>
+          <p:cNvPr id="10" name="Col 1" descr="">
+            <a:extLst>
+              <a:ext uri="{C183D7F6-B498-43B3-948B-1728B52AA6E4}">
+                <adec:decorative xmlns:adec="http://schemas.microsoft.com/office/drawing/2017/decorative" val="1"/>
+              </a:ext>
+            </a:extLst>
+          </p:cNvPr>
           <p:cNvSpPr/>
           <p:nvPr/>
         </p:nvSpPr>
@@ -6038,7 +6337,13 @@
       </p:sp>
       <p:sp>
         <p:nvSpPr>
-          <p:cNvPr id="11" name="Icon FaCloudArrowUp"/>
+          <p:cNvPr id="11" name="Icon FaCloudArrowUp" descr="">
+            <a:extLst>
+              <a:ext uri="{C183D7F6-B498-43B3-948B-1728B52AA6E4}">
+                <adec:decorative xmlns:adec="http://schemas.microsoft.com/office/drawing/2017/decorative" val="1"/>
+              </a:ext>
+            </a:extLst>
+          </p:cNvPr>
           <p:cNvSpPr/>
           <p:nvPr/>
         </p:nvSpPr>
@@ -6063,7 +6368,13 @@
       </p:sp>
       <p:pic>
         <p:nvPicPr>
-          <p:cNvPr id="12" name="Image 1" descr="C:\Users\whale\git\mwb-b03\presentations\_build\icons\FaCloudArrowUp.png">    </p:cNvPr>
+          <p:cNvPr id="12" name="Image 1" descr="">
+            <a:extLst>
+              <a:ext uri="{C183D7F6-B498-43B3-948B-1728B52AA6E4}">
+                <adec:decorative xmlns:adec="http://schemas.microsoft.com/office/drawing/2017/decorative" val="1"/>
+              </a:ext>
+            </a:extLst>
+          </p:cNvPr>
           <p:cNvPicPr>
             <a:picLocks noChangeAspect="1"/>
           </p:cNvPicPr>
@@ -6202,7 +6513,13 @@
       </p:sp>
       <p:sp>
         <p:nvSpPr>
-          <p:cNvPr id="15" name="Window"/>
+          <p:cNvPr id="15" name="Window" descr="">
+            <a:extLst>
+              <a:ext uri="{C183D7F6-B498-43B3-948B-1728B52AA6E4}">
+                <adec:decorative xmlns:adec="http://schemas.microsoft.com/office/drawing/2017/decorative" val="1"/>
+              </a:ext>
+            </a:extLst>
+          </p:cNvPr>
           <p:cNvSpPr/>
           <p:nvPr/>
         </p:nvSpPr>
@@ -6236,7 +6553,13 @@
       </p:sp>
       <p:sp>
         <p:nvSpPr>
-          <p:cNvPr id="16" name="Icon FaDoorOpen"/>
+          <p:cNvPr id="16" name="Icon FaDoorOpen" descr="">
+            <a:extLst>
+              <a:ext uri="{C183D7F6-B498-43B3-948B-1728B52AA6E4}">
+                <adec:decorative xmlns:adec="http://schemas.microsoft.com/office/drawing/2017/decorative" val="1"/>
+              </a:ext>
+            </a:extLst>
+          </p:cNvPr>
           <p:cNvSpPr/>
           <p:nvPr/>
         </p:nvSpPr>
@@ -6261,7 +6584,13 @@
       </p:sp>
       <p:pic>
         <p:nvPicPr>
-          <p:cNvPr id="17" name="Image 2" descr="C:\Users\whale\git\mwb-b03\presentations\_build\icons\FaDoorOpen.png">    </p:cNvPr>
+          <p:cNvPr id="17" name="Image 2" descr="">
+            <a:extLst>
+              <a:ext uri="{C183D7F6-B498-43B3-948B-1728B52AA6E4}">
+                <adec:decorative xmlns:adec="http://schemas.microsoft.com/office/drawing/2017/decorative" val="1"/>
+              </a:ext>
+            </a:extLst>
+          </p:cNvPr>
           <p:cNvPicPr>
             <a:picLocks noChangeAspect="1"/>
           </p:cNvPicPr>
@@ -6360,7 +6689,13 @@
       </p:sp>
       <p:sp>
         <p:nvSpPr>
-          <p:cNvPr id="20" name="Limit"/>
+          <p:cNvPr id="20" name="Limit" descr="">
+            <a:extLst>
+              <a:ext uri="{C183D7F6-B498-43B3-948B-1728B52AA6E4}">
+                <adec:decorative xmlns:adec="http://schemas.microsoft.com/office/drawing/2017/decorative" val="1"/>
+              </a:ext>
+            </a:extLst>
+          </p:cNvPr>
           <p:cNvSpPr/>
           <p:nvPr/>
         </p:nvSpPr>
@@ -6394,7 +6729,13 @@
       </p:sp>
       <p:sp>
         <p:nvSpPr>
-          <p:cNvPr id="21" name="Icon FaScaleBalanced"/>
+          <p:cNvPr id="21" name="Icon FaScaleBalanced" descr="">
+            <a:extLst>
+              <a:ext uri="{C183D7F6-B498-43B3-948B-1728B52AA6E4}">
+                <adec:decorative xmlns:adec="http://schemas.microsoft.com/office/drawing/2017/decorative" val="1"/>
+              </a:ext>
+            </a:extLst>
+          </p:cNvPr>
           <p:cNvSpPr/>
           <p:nvPr/>
         </p:nvSpPr>
@@ -6419,7 +6760,13 @@
       </p:sp>
       <p:pic>
         <p:nvPicPr>
-          <p:cNvPr id="22" name="Image 3" descr="C:\Users\whale\git\mwb-b03\presentations\_build\icons\FaScaleBalanced.png">    </p:cNvPr>
+          <p:cNvPr id="22" name="Image 3" descr="">
+            <a:extLst>
+              <a:ext uri="{C183D7F6-B498-43B3-948B-1728B52AA6E4}">
+                <adec:decorative xmlns:adec="http://schemas.microsoft.com/office/drawing/2017/decorative" val="1"/>
+              </a:ext>
+            </a:extLst>
+          </p:cNvPr>
           <p:cNvPicPr>
             <a:picLocks noChangeAspect="1"/>
           </p:cNvPicPr>
@@ -6637,7 +6984,13 @@
       </p:sp>
       <p:sp>
         <p:nvSpPr>
-          <p:cNvPr id="3" name="Tag What"/>
+          <p:cNvPr id="3" name="Tag What" descr="">
+            <a:extLst>
+              <a:ext uri="{C183D7F6-B498-43B3-948B-1728B52AA6E4}">
+                <adec:decorative xmlns:adec="http://schemas.microsoft.com/office/drawing/2017/decorative" val="1"/>
+              </a:ext>
+            </a:extLst>
+          </p:cNvPr>
           <p:cNvSpPr/>
           <p:nvPr/>
         </p:nvSpPr>
@@ -6719,7 +7072,7 @@
         <a:graphic>
           <a:graphicData uri="http://schemas.openxmlformats.org/drawingml/2006/table">
             <a:tbl>
-              <a:tblPr/>
+              <a:tblPr firstRow="1" bandRow="1"/>
               <a:tblGrid>
                 <a:gridCol w="3520440"/>
                 <a:gridCol w="1325880"/>
@@ -8868,7 +9221,13 @@
       </p:graphicFrame>
       <p:sp>
         <p:nvSpPr>
-          <p:cNvPr id="6" name="Judgment"/>
+          <p:cNvPr id="6" name="Judgment" descr="">
+            <a:extLst>
+              <a:ext uri="{C183D7F6-B498-43B3-948B-1728B52AA6E4}">
+                <adec:decorative xmlns:adec="http://schemas.microsoft.com/office/drawing/2017/decorative" val="1"/>
+              </a:ext>
+            </a:extLst>
+          </p:cNvPr>
           <p:cNvSpPr/>
           <p:nvPr/>
         </p:nvSpPr>
@@ -8902,7 +9261,13 @@
       </p:sp>
       <p:sp>
         <p:nvSpPr>
-          <p:cNvPr id="7" name="Icon FaLightbulb"/>
+          <p:cNvPr id="7" name="Icon FaLightbulb" descr="">
+            <a:extLst>
+              <a:ext uri="{C183D7F6-B498-43B3-948B-1728B52AA6E4}">
+                <adec:decorative xmlns:adec="http://schemas.microsoft.com/office/drawing/2017/decorative" val="1"/>
+              </a:ext>
+            </a:extLst>
+          </p:cNvPr>
           <p:cNvSpPr/>
           <p:nvPr/>
         </p:nvSpPr>
@@ -8927,7 +9292,13 @@
       </p:sp>
       <p:pic>
         <p:nvPicPr>
-          <p:cNvPr id="8" name="Image 0" descr="C:\Users\whale\git\mwb-b03\presentations\_build\icons\FaLightbulb.png">    </p:cNvPr>
+          <p:cNvPr id="8" name="Image 0" descr="">
+            <a:extLst>
+              <a:ext uri="{C183D7F6-B498-43B3-948B-1728B52AA6E4}">
+                <adec:decorative xmlns:adec="http://schemas.microsoft.com/office/drawing/2017/decorative" val="1"/>
+              </a:ext>
+            </a:extLst>
+          </p:cNvPr>
           <p:cNvPicPr>
             <a:picLocks noChangeAspect="1"/>
           </p:cNvPicPr>
@@ -9145,7 +9516,13 @@
       </p:sp>
       <p:sp>
         <p:nvSpPr>
-          <p:cNvPr id="3" name="Tag What"/>
+          <p:cNvPr id="3" name="Tag What" descr="">
+            <a:extLst>
+              <a:ext uri="{C183D7F6-B498-43B3-948B-1728B52AA6E4}">
+                <adec:decorative xmlns:adec="http://schemas.microsoft.com/office/drawing/2017/decorative" val="1"/>
+              </a:ext>
+            </a:extLst>
+          </p:cNvPr>
           <p:cNvSpPr/>
           <p:nvPr/>
         </p:nvSpPr>
@@ -9227,7 +9604,7 @@
         <a:graphic>
           <a:graphicData uri="http://schemas.openxmlformats.org/drawingml/2006/table">
             <a:tbl>
-              <a:tblPr/>
+              <a:tblPr firstRow="1" bandRow="1"/>
               <a:tblGrid>
                 <a:gridCol w="2651760"/>
                 <a:gridCol w="4206240"/>
@@ -9790,7 +10167,13 @@
       </p:graphicFrame>
       <p:sp>
         <p:nvSpPr>
-          <p:cNvPr id="6" name="Model box"/>
+          <p:cNvPr id="6" name="Model box" descr="">
+            <a:extLst>
+              <a:ext uri="{C183D7F6-B498-43B3-948B-1728B52AA6E4}">
+                <adec:decorative xmlns:adec="http://schemas.microsoft.com/office/drawing/2017/decorative" val="1"/>
+              </a:ext>
+            </a:extLst>
+          </p:cNvPr>
           <p:cNvSpPr/>
           <p:nvPr/>
         </p:nvSpPr>
@@ -9824,7 +10207,13 @@
       </p:sp>
       <p:sp>
         <p:nvSpPr>
-          <p:cNvPr id="7" name="Icon FaSitemap"/>
+          <p:cNvPr id="7" name="Icon FaSitemap" descr="">
+            <a:extLst>
+              <a:ext uri="{C183D7F6-B498-43B3-948B-1728B52AA6E4}">
+                <adec:decorative xmlns:adec="http://schemas.microsoft.com/office/drawing/2017/decorative" val="1"/>
+              </a:ext>
+            </a:extLst>
+          </p:cNvPr>
           <p:cNvSpPr/>
           <p:nvPr/>
         </p:nvSpPr>
@@ -9849,7 +10238,13 @@
       </p:sp>
       <p:pic>
         <p:nvPicPr>
-          <p:cNvPr id="8" name="Image 0" descr="C:\Users\whale\git\mwb-b03\presentations\_build\icons\FaSitemap.png">    </p:cNvPr>
+          <p:cNvPr id="8" name="Image 0" descr="">
+            <a:extLst>
+              <a:ext uri="{C183D7F6-B498-43B3-948B-1728B52AA6E4}">
+                <adec:decorative xmlns:adec="http://schemas.microsoft.com/office/drawing/2017/decorative" val="1"/>
+              </a:ext>
+            </a:extLst>
+          </p:cNvPr>
           <p:cNvPicPr>
             <a:picLocks noChangeAspect="1"/>
           </p:cNvPicPr>
@@ -9988,7 +10383,13 @@
       </p:sp>
       <p:sp>
         <p:nvSpPr>
-          <p:cNvPr id="11" name="Rule"/>
+          <p:cNvPr id="11" name="Rule" descr="">
+            <a:extLst>
+              <a:ext uri="{C183D7F6-B498-43B3-948B-1728B52AA6E4}">
+                <adec:decorative xmlns:adec="http://schemas.microsoft.com/office/drawing/2017/decorative" val="1"/>
+              </a:ext>
+            </a:extLst>
+          </p:cNvPr>
           <p:cNvSpPr/>
           <p:nvPr/>
         </p:nvSpPr>
@@ -10022,7 +10423,13 @@
       </p:sp>
       <p:sp>
         <p:nvSpPr>
-          <p:cNvPr id="12" name="Icon FaKey"/>
+          <p:cNvPr id="12" name="Icon FaKey" descr="">
+            <a:extLst>
+              <a:ext uri="{C183D7F6-B498-43B3-948B-1728B52AA6E4}">
+                <adec:decorative xmlns:adec="http://schemas.microsoft.com/office/drawing/2017/decorative" val="1"/>
+              </a:ext>
+            </a:extLst>
+          </p:cNvPr>
           <p:cNvSpPr/>
           <p:nvPr/>
         </p:nvSpPr>
@@ -10047,7 +10454,13 @@
       </p:sp>
       <p:pic>
         <p:nvPicPr>
-          <p:cNvPr id="13" name="Image 1" descr="C:\Users\whale\git\mwb-b03\presentations\_build\icons\FaKey.png">    </p:cNvPr>
+          <p:cNvPr id="13" name="Image 1" descr="">
+            <a:extLst>
+              <a:ext uri="{C183D7F6-B498-43B3-948B-1728B52AA6E4}">
+                <adec:decorative xmlns:adec="http://schemas.microsoft.com/office/drawing/2017/decorative" val="1"/>
+              </a:ext>
+            </a:extLst>
+          </p:cNvPr>
           <p:cNvPicPr>
             <a:picLocks noChangeAspect="1"/>
           </p:cNvPicPr>
@@ -10265,7 +10678,13 @@
       </p:sp>
       <p:sp>
         <p:nvSpPr>
-          <p:cNvPr id="3" name="Tag What"/>
+          <p:cNvPr id="3" name="Tag What" descr="">
+            <a:extLst>
+              <a:ext uri="{C183D7F6-B498-43B3-948B-1728B52AA6E4}">
+                <adec:decorative xmlns:adec="http://schemas.microsoft.com/office/drawing/2017/decorative" val="1"/>
+              </a:ext>
+            </a:extLst>
+          </p:cNvPr>
           <p:cNvSpPr/>
           <p:nvPr/>
         </p:nvSpPr>
@@ -10328,7 +10747,13 @@
       </p:sp>
       <p:sp>
         <p:nvSpPr>
-          <p:cNvPr id="5" name="Pipe 0"/>
+          <p:cNvPr id="5" name="Pipe 0" descr="">
+            <a:extLst>
+              <a:ext uri="{C183D7F6-B498-43B3-948B-1728B52AA6E4}">
+                <adec:decorative xmlns:adec="http://schemas.microsoft.com/office/drawing/2017/decorative" val="1"/>
+              </a:ext>
+            </a:extLst>
+          </p:cNvPr>
           <p:cNvSpPr/>
           <p:nvPr/>
         </p:nvSpPr>
@@ -10421,7 +10846,13 @@
       </p:sp>
       <p:sp>
         <p:nvSpPr>
-          <p:cNvPr id="7" name="Pipe 1"/>
+          <p:cNvPr id="7" name="Pipe 1" descr="">
+            <a:extLst>
+              <a:ext uri="{C183D7F6-B498-43B3-948B-1728B52AA6E4}">
+                <adec:decorative xmlns:adec="http://schemas.microsoft.com/office/drawing/2017/decorative" val="1"/>
+              </a:ext>
+            </a:extLst>
+          </p:cNvPr>
           <p:cNvSpPr/>
           <p:nvPr/>
         </p:nvSpPr>
@@ -10514,7 +10945,13 @@
       </p:sp>
       <p:sp>
         <p:nvSpPr>
-          <p:cNvPr id="9" name="Pipe 2"/>
+          <p:cNvPr id="9" name="Pipe 2" descr="">
+            <a:extLst>
+              <a:ext uri="{C183D7F6-B498-43B3-948B-1728B52AA6E4}">
+                <adec:decorative xmlns:adec="http://schemas.microsoft.com/office/drawing/2017/decorative" val="1"/>
+              </a:ext>
+            </a:extLst>
+          </p:cNvPr>
           <p:cNvSpPr/>
           <p:nvPr/>
         </p:nvSpPr>
@@ -10607,7 +11044,13 @@
       </p:sp>
       <p:sp>
         <p:nvSpPr>
-          <p:cNvPr id="11" name="Pipe 3"/>
+          <p:cNvPr id="11" name="Pipe 3" descr="">
+            <a:extLst>
+              <a:ext uri="{C183D7F6-B498-43B3-948B-1728B52AA6E4}">
+                <adec:decorative xmlns:adec="http://schemas.microsoft.com/office/drawing/2017/decorative" val="1"/>
+              </a:ext>
+            </a:extLst>
+          </p:cNvPr>
           <p:cNvSpPr/>
           <p:nvPr/>
         </p:nvSpPr>
@@ -10747,7 +11190,13 @@
       </p:sp>
       <p:sp>
         <p:nvSpPr>
-          <p:cNvPr id="14" name="Example"/>
+          <p:cNvPr id="14" name="Example" descr="">
+            <a:extLst>
+              <a:ext uri="{C183D7F6-B498-43B3-948B-1728B52AA6E4}">
+                <adec:decorative xmlns:adec="http://schemas.microsoft.com/office/drawing/2017/decorative" val="1"/>
+              </a:ext>
+            </a:extLst>
+          </p:cNvPr>
           <p:cNvSpPr/>
           <p:nvPr/>
         </p:nvSpPr>
@@ -10781,7 +11230,13 @@
       </p:sp>
       <p:sp>
         <p:nvSpPr>
-          <p:cNvPr id="15" name="Icon FaRightLeft"/>
+          <p:cNvPr id="15" name="Icon FaRightLeft" descr="">
+            <a:extLst>
+              <a:ext uri="{C183D7F6-B498-43B3-948B-1728B52AA6E4}">
+                <adec:decorative xmlns:adec="http://schemas.microsoft.com/office/drawing/2017/decorative" val="1"/>
+              </a:ext>
+            </a:extLst>
+          </p:cNvPr>
           <p:cNvSpPr/>
           <p:nvPr/>
         </p:nvSpPr>
@@ -10806,7 +11261,13 @@
       </p:sp>
       <p:pic>
         <p:nvPicPr>
-          <p:cNvPr id="16" name="Image 0" descr="C:\Users\whale\git\mwb-b03\presentations\_build\icons\FaRightLeft.png">    </p:cNvPr>
+          <p:cNvPr id="16" name="Image 0" descr="">
+            <a:extLst>
+              <a:ext uri="{C183D7F6-B498-43B3-948B-1728B52AA6E4}">
+                <adec:decorative xmlns:adec="http://schemas.microsoft.com/office/drawing/2017/decorative" val="1"/>
+              </a:ext>
+            </a:extLst>
+          </p:cNvPr>
           <p:cNvPicPr>
             <a:picLocks noChangeAspect="1"/>
           </p:cNvPicPr>
@@ -11024,7 +11485,13 @@
       </p:sp>
       <p:sp>
         <p:nvSpPr>
-          <p:cNvPr id="3" name="Tag Who"/>
+          <p:cNvPr id="3" name="Tag Who" descr="">
+            <a:extLst>
+              <a:ext uri="{C183D7F6-B498-43B3-948B-1728B52AA6E4}">
+                <adec:decorative xmlns:adec="http://schemas.microsoft.com/office/drawing/2017/decorative" val="1"/>
+              </a:ext>
+            </a:extLst>
+          </p:cNvPr>
           <p:cNvSpPr/>
           <p:nvPr/>
         </p:nvSpPr>
@@ -11087,7 +11554,13 @@
       </p:sp>
       <p:sp>
         <p:nvSpPr>
-          <p:cNvPr id="5" name="Who col 1"/>
+          <p:cNvPr id="5" name="Who col 1" descr="">
+            <a:extLst>
+              <a:ext uri="{C183D7F6-B498-43B3-948B-1728B52AA6E4}">
+                <adec:decorative xmlns:adec="http://schemas.microsoft.com/office/drawing/2017/decorative" val="1"/>
+              </a:ext>
+            </a:extLst>
+          </p:cNvPr>
           <p:cNvSpPr/>
           <p:nvPr/>
         </p:nvSpPr>
@@ -11121,7 +11594,13 @@
       </p:sp>
       <p:sp>
         <p:nvSpPr>
-          <p:cNvPr id="6" name="Icon FaBuildingColumns"/>
+          <p:cNvPr id="6" name="Icon FaBuildingColumns" descr="">
+            <a:extLst>
+              <a:ext uri="{C183D7F6-B498-43B3-948B-1728B52AA6E4}">
+                <adec:decorative xmlns:adec="http://schemas.microsoft.com/office/drawing/2017/decorative" val="1"/>
+              </a:ext>
+            </a:extLst>
+          </p:cNvPr>
           <p:cNvSpPr/>
           <p:nvPr/>
         </p:nvSpPr>
@@ -11146,7 +11625,13 @@
       </p:sp>
       <p:pic>
         <p:nvPicPr>
-          <p:cNvPr id="7" name="Image 0" descr="C:\Users\whale\git\mwb-b03\presentations\_build\icons\FaBuildingColumns.png">    </p:cNvPr>
+          <p:cNvPr id="7" name="Image 0" descr="">
+            <a:extLst>
+              <a:ext uri="{C183D7F6-B498-43B3-948B-1728B52AA6E4}">
+                <adec:decorative xmlns:adec="http://schemas.microsoft.com/office/drawing/2017/decorative" val="1"/>
+              </a:ext>
+            </a:extLst>
+          </p:cNvPr>
           <p:cNvPicPr>
             <a:picLocks noChangeAspect="1"/>
           </p:cNvPicPr>
@@ -11333,7 +11818,13 @@
       </p:sp>
       <p:sp>
         <p:nvSpPr>
-          <p:cNvPr id="10" name="Who col 2"/>
+          <p:cNvPr id="10" name="Who col 2" descr="">
+            <a:extLst>
+              <a:ext uri="{C183D7F6-B498-43B3-948B-1728B52AA6E4}">
+                <adec:decorative xmlns:adec="http://schemas.microsoft.com/office/drawing/2017/decorative" val="1"/>
+              </a:ext>
+            </a:extLst>
+          </p:cNvPr>
           <p:cNvSpPr/>
           <p:nvPr/>
         </p:nvSpPr>
@@ -11367,7 +11858,13 @@
       </p:sp>
       <p:sp>
         <p:nvSpPr>
-          <p:cNvPr id="11" name="Icon FaUsersGear"/>
+          <p:cNvPr id="11" name="Icon FaUsersGear" descr="">
+            <a:extLst>
+              <a:ext uri="{C183D7F6-B498-43B3-948B-1728B52AA6E4}">
+                <adec:decorative xmlns:adec="http://schemas.microsoft.com/office/drawing/2017/decorative" val="1"/>
+              </a:ext>
+            </a:extLst>
+          </p:cNvPr>
           <p:cNvSpPr/>
           <p:nvPr/>
         </p:nvSpPr>
@@ -11392,7 +11889,13 @@
       </p:sp>
       <p:pic>
         <p:nvPicPr>
-          <p:cNvPr id="12" name="Image 1" descr="C:\Users\whale\git\mwb-b03\presentations\_build\icons\FaUsersGear.png">    </p:cNvPr>
+          <p:cNvPr id="12" name="Image 1" descr="">
+            <a:extLst>
+              <a:ext uri="{C183D7F6-B498-43B3-948B-1728B52AA6E4}">
+                <adec:decorative xmlns:adec="http://schemas.microsoft.com/office/drawing/2017/decorative" val="1"/>
+              </a:ext>
+            </a:extLst>
+          </p:cNvPr>
           <p:cNvPicPr>
             <a:picLocks noChangeAspect="1"/>
           </p:cNvPicPr>
@@ -11579,7 +12082,13 @@
       </p:sp>
       <p:sp>
         <p:nvSpPr>
-          <p:cNvPr id="15" name="Who col 3"/>
+          <p:cNvPr id="15" name="Who col 3" descr="">
+            <a:extLst>
+              <a:ext uri="{C183D7F6-B498-43B3-948B-1728B52AA6E4}">
+                <adec:decorative xmlns:adec="http://schemas.microsoft.com/office/drawing/2017/decorative" val="1"/>
+              </a:ext>
+            </a:extLst>
+          </p:cNvPr>
           <p:cNvSpPr/>
           <p:nvPr/>
         </p:nvSpPr>
@@ -11613,7 +12122,13 @@
       </p:sp>
       <p:sp>
         <p:nvSpPr>
-          <p:cNvPr id="16" name="Icon FaShieldHalved"/>
+          <p:cNvPr id="16" name="Icon FaShieldHalved" descr="">
+            <a:extLst>
+              <a:ext uri="{C183D7F6-B498-43B3-948B-1728B52AA6E4}">
+                <adec:decorative xmlns:adec="http://schemas.microsoft.com/office/drawing/2017/decorative" val="1"/>
+              </a:ext>
+            </a:extLst>
+          </p:cNvPr>
           <p:cNvSpPr/>
           <p:nvPr/>
         </p:nvSpPr>
@@ -11638,7 +12153,13 @@
       </p:sp>
       <p:pic>
         <p:nvPicPr>
-          <p:cNvPr id="17" name="Image 2" descr="C:\Users\whale\git\mwb-b03\presentations\_build\icons\FaShieldHalved.png">    </p:cNvPr>
+          <p:cNvPr id="17" name="Image 2" descr="">
+            <a:extLst>
+              <a:ext uri="{C183D7F6-B498-43B3-948B-1728B52AA6E4}">
+                <adec:decorative xmlns:adec="http://schemas.microsoft.com/office/drawing/2017/decorative" val="1"/>
+              </a:ext>
+            </a:extLst>
+          </p:cNvPr>
           <p:cNvPicPr>
             <a:picLocks noChangeAspect="1"/>
           </p:cNvPicPr>
@@ -11825,7 +12346,13 @@
       </p:sp>
       <p:sp>
         <p:nvSpPr>
-          <p:cNvPr id="20" name="Architect"/>
+          <p:cNvPr id="20" name="Architect" descr="">
+            <a:extLst>
+              <a:ext uri="{C183D7F6-B498-43B3-948B-1728B52AA6E4}">
+                <adec:decorative xmlns:adec="http://schemas.microsoft.com/office/drawing/2017/decorative" val="1"/>
+              </a:ext>
+            </a:extLst>
+          </p:cNvPr>
           <p:cNvSpPr/>
           <p:nvPr/>
         </p:nvSpPr>
@@ -11859,7 +12386,13 @@
       </p:sp>
       <p:sp>
         <p:nvSpPr>
-          <p:cNvPr id="21" name="Icon FaSitemap"/>
+          <p:cNvPr id="21" name="Icon FaSitemap" descr="">
+            <a:extLst>
+              <a:ext uri="{C183D7F6-B498-43B3-948B-1728B52AA6E4}">
+                <adec:decorative xmlns:adec="http://schemas.microsoft.com/office/drawing/2017/decorative" val="1"/>
+              </a:ext>
+            </a:extLst>
+          </p:cNvPr>
           <p:cNvSpPr/>
           <p:nvPr/>
         </p:nvSpPr>
@@ -11884,7 +12417,13 @@
       </p:sp>
       <p:pic>
         <p:nvPicPr>
-          <p:cNvPr id="22" name="Image 3" descr="C:\Users\whale\git\mwb-b03\presentations\_build\icons\FaSitemap.png">    </p:cNvPr>
+          <p:cNvPr id="22" name="Image 3" descr="">
+            <a:extLst>
+              <a:ext uri="{C183D7F6-B498-43B3-948B-1728B52AA6E4}">
+                <adec:decorative xmlns:adec="http://schemas.microsoft.com/office/drawing/2017/decorative" val="1"/>
+              </a:ext>
+            </a:extLst>
+          </p:cNvPr>
           <p:cNvPicPr>
             <a:picLocks noChangeAspect="1"/>
           </p:cNvPicPr>
@@ -12102,7 +12641,13 @@
       </p:sp>
       <p:sp>
         <p:nvSpPr>
-          <p:cNvPr id="3" name="Tag How"/>
+          <p:cNvPr id="3" name="Tag How" descr="">
+            <a:extLst>
+              <a:ext uri="{C183D7F6-B498-43B3-948B-1728B52AA6E4}">
+                <adec:decorative xmlns:adec="http://schemas.microsoft.com/office/drawing/2017/decorative" val="1"/>
+              </a:ext>
+            </a:extLst>
+          </p:cNvPr>
           <p:cNvSpPr/>
           <p:nvPr/>
         </p:nvSpPr>
@@ -12165,7 +12710,13 @@
       </p:sp>
       <p:sp>
         <p:nvSpPr>
-          <p:cNvPr id="5" name="Ev 0"/>
+          <p:cNvPr id="5" name="Ev 0" descr="">
+            <a:extLst>
+              <a:ext uri="{C183D7F6-B498-43B3-948B-1728B52AA6E4}">
+                <adec:decorative xmlns:adec="http://schemas.microsoft.com/office/drawing/2017/decorative" val="1"/>
+              </a:ext>
+            </a:extLst>
+          </p:cNvPr>
           <p:cNvSpPr/>
           <p:nvPr/>
         </p:nvSpPr>
@@ -12249,7 +12800,13 @@
       </p:sp>
       <p:sp>
         <p:nvSpPr>
-          <p:cNvPr id="7" name="Ev 1"/>
+          <p:cNvPr id="7" name="Ev 1" descr="">
+            <a:extLst>
+              <a:ext uri="{C183D7F6-B498-43B3-948B-1728B52AA6E4}">
+                <adec:decorative xmlns:adec="http://schemas.microsoft.com/office/drawing/2017/decorative" val="1"/>
+              </a:ext>
+            </a:extLst>
+          </p:cNvPr>
           <p:cNvSpPr/>
           <p:nvPr/>
         </p:nvSpPr>
@@ -12333,7 +12890,13 @@
       </p:sp>
       <p:sp>
         <p:nvSpPr>
-          <p:cNvPr id="9" name="Ev 2"/>
+          <p:cNvPr id="9" name="Ev 2" descr="">
+            <a:extLst>
+              <a:ext uri="{C183D7F6-B498-43B3-948B-1728B52AA6E4}">
+                <adec:decorative xmlns:adec="http://schemas.microsoft.com/office/drawing/2017/decorative" val="1"/>
+              </a:ext>
+            </a:extLst>
+          </p:cNvPr>
           <p:cNvSpPr/>
           <p:nvPr/>
         </p:nvSpPr>
@@ -12417,7 +12980,13 @@
       </p:sp>
       <p:sp>
         <p:nvSpPr>
-          <p:cNvPr id="11" name="Facts"/>
+          <p:cNvPr id="11" name="Facts" descr="">
+            <a:extLst>
+              <a:ext uri="{C183D7F6-B498-43B3-948B-1728B52AA6E4}">
+                <adec:decorative xmlns:adec="http://schemas.microsoft.com/office/drawing/2017/decorative" val="1"/>
+              </a:ext>
+            </a:extLst>
+          </p:cNvPr>
           <p:cNvSpPr/>
           <p:nvPr/>
         </p:nvSpPr>
@@ -12581,7 +13150,13 @@
       </p:sp>
       <p:sp>
         <p:nvSpPr>
-          <p:cNvPr id="14" name="Codes"/>
+          <p:cNvPr id="14" name="Codes" descr="">
+            <a:extLst>
+              <a:ext uri="{C183D7F6-B498-43B3-948B-1728B52AA6E4}">
+                <adec:decorative xmlns:adec="http://schemas.microsoft.com/office/drawing/2017/decorative" val="1"/>
+              </a:ext>
+            </a:extLst>
+          </p:cNvPr>
           <p:cNvSpPr/>
           <p:nvPr/>
         </p:nvSpPr>
@@ -12615,7 +13190,13 @@
       </p:sp>
       <p:sp>
         <p:nvSpPr>
-          <p:cNvPr id="15" name="Icon FaListCheck"/>
+          <p:cNvPr id="15" name="Icon FaListCheck" descr="">
+            <a:extLst>
+              <a:ext uri="{C183D7F6-B498-43B3-948B-1728B52AA6E4}">
+                <adec:decorative xmlns:adec="http://schemas.microsoft.com/office/drawing/2017/decorative" val="1"/>
+              </a:ext>
+            </a:extLst>
+          </p:cNvPr>
           <p:cNvSpPr/>
           <p:nvPr/>
         </p:nvSpPr>
@@ -12640,7 +13221,13 @@
       </p:sp>
       <p:pic>
         <p:nvPicPr>
-          <p:cNvPr id="16" name="Image 0" descr="C:\Users\whale\git\mwb-b03\presentations\_build\icons\FaListCheck.png">    </p:cNvPr>
+          <p:cNvPr id="16" name="Image 0" descr="">
+            <a:extLst>
+              <a:ext uri="{C183D7F6-B498-43B3-948B-1728B52AA6E4}">
+                <adec:decorative xmlns:adec="http://schemas.microsoft.com/office/drawing/2017/decorative" val="1"/>
+              </a:ext>
+            </a:extLst>
+          </p:cNvPr>
           <p:cNvPicPr>
             <a:picLocks noChangeAspect="1"/>
           </p:cNvPicPr>
@@ -12858,7 +13445,13 @@
       </p:sp>
       <p:sp>
         <p:nvSpPr>
-          <p:cNvPr id="3" name="Tag How"/>
+          <p:cNvPr id="3" name="Tag How" descr="">
+            <a:extLst>
+              <a:ext uri="{C183D7F6-B498-43B3-948B-1728B52AA6E4}">
+                <adec:decorative xmlns:adec="http://schemas.microsoft.com/office/drawing/2017/decorative" val="1"/>
+              </a:ext>
+            </a:extLst>
+          </p:cNvPr>
           <p:cNvSpPr/>
           <p:nvPr/>
         </p:nvSpPr>
@@ -12921,7 +13514,13 @@
       </p:sp>
       <p:sp>
         <p:nvSpPr>
-          <p:cNvPr id="5" name="Chain 0"/>
+          <p:cNvPr id="5" name="Chain 0" descr="">
+            <a:extLst>
+              <a:ext uri="{C183D7F6-B498-43B3-948B-1728B52AA6E4}">
+                <adec:decorative xmlns:adec="http://schemas.microsoft.com/office/drawing/2017/decorative" val="1"/>
+              </a:ext>
+            </a:extLst>
+          </p:cNvPr>
           <p:cNvSpPr/>
           <p:nvPr/>
         </p:nvSpPr>
@@ -12991,7 +13590,13 @@
       </p:sp>
       <p:sp>
         <p:nvSpPr>
-          <p:cNvPr id="7" name="Chain 1"/>
+          <p:cNvPr id="7" name="Chain 1" descr="">
+            <a:extLst>
+              <a:ext uri="{C183D7F6-B498-43B3-948B-1728B52AA6E4}">
+                <adec:decorative xmlns:adec="http://schemas.microsoft.com/office/drawing/2017/decorative" val="1"/>
+              </a:ext>
+            </a:extLst>
+          </p:cNvPr>
           <p:cNvSpPr/>
           <p:nvPr/>
         </p:nvSpPr>
@@ -13061,7 +13666,13 @@
       </p:sp>
       <p:sp>
         <p:nvSpPr>
-          <p:cNvPr id="9" name="Chain 2"/>
+          <p:cNvPr id="9" name="Chain 2" descr="">
+            <a:extLst>
+              <a:ext uri="{C183D7F6-B498-43B3-948B-1728B52AA6E4}">
+                <adec:decorative xmlns:adec="http://schemas.microsoft.com/office/drawing/2017/decorative" val="1"/>
+              </a:ext>
+            </a:extLst>
+          </p:cNvPr>
           <p:cNvSpPr/>
           <p:nvPr/>
         </p:nvSpPr>
@@ -13131,7 +13742,13 @@
       </p:sp>
       <p:sp>
         <p:nvSpPr>
-          <p:cNvPr id="11" name="Chain 3"/>
+          <p:cNvPr id="11" name="Chain 3" descr="">
+            <a:extLst>
+              <a:ext uri="{C183D7F6-B498-43B3-948B-1728B52AA6E4}">
+                <adec:decorative xmlns:adec="http://schemas.microsoft.com/office/drawing/2017/decorative" val="1"/>
+              </a:ext>
+            </a:extLst>
+          </p:cNvPr>
           <p:cNvSpPr/>
           <p:nvPr/>
         </p:nvSpPr>
@@ -13201,7 +13818,13 @@
       </p:sp>
       <p:sp>
         <p:nvSpPr>
-          <p:cNvPr id="13" name="Chain 4"/>
+          <p:cNvPr id="13" name="Chain 4" descr="">
+            <a:extLst>
+              <a:ext uri="{C183D7F6-B498-43B3-948B-1728B52AA6E4}">
+                <adec:decorative xmlns:adec="http://schemas.microsoft.com/office/drawing/2017/decorative" val="1"/>
+              </a:ext>
+            </a:extLst>
+          </p:cNvPr>
           <p:cNvSpPr/>
           <p:nvPr/>
         </p:nvSpPr>
@@ -13307,7 +13930,13 @@
       </p:sp>
       <p:sp>
         <p:nvSpPr>
-          <p:cNvPr id="16" name="Drift 0"/>
+          <p:cNvPr id="16" name="Drift 0" descr="">
+            <a:extLst>
+              <a:ext uri="{C183D7F6-B498-43B3-948B-1728B52AA6E4}">
+                <adec:decorative xmlns:adec="http://schemas.microsoft.com/office/drawing/2017/decorative" val="1"/>
+              </a:ext>
+            </a:extLst>
+          </p:cNvPr>
           <p:cNvSpPr/>
           <p:nvPr/>
         </p:nvSpPr>
@@ -13391,7 +14020,13 @@
       </p:sp>
       <p:sp>
         <p:nvSpPr>
-          <p:cNvPr id="18" name="Drift 1"/>
+          <p:cNvPr id="18" name="Drift 1" descr="">
+            <a:extLst>
+              <a:ext uri="{C183D7F6-B498-43B3-948B-1728B52AA6E4}">
+                <adec:decorative xmlns:adec="http://schemas.microsoft.com/office/drawing/2017/decorative" val="1"/>
+              </a:ext>
+            </a:extLst>
+          </p:cNvPr>
           <p:cNvSpPr/>
           <p:nvPr/>
         </p:nvSpPr>
@@ -13475,7 +14110,13 @@
       </p:sp>
       <p:sp>
         <p:nvSpPr>
-          <p:cNvPr id="20" name="Drift 2"/>
+          <p:cNvPr id="20" name="Drift 2" descr="">
+            <a:extLst>
+              <a:ext uri="{C183D7F6-B498-43B3-948B-1728B52AA6E4}">
+                <adec:decorative xmlns:adec="http://schemas.microsoft.com/office/drawing/2017/decorative" val="1"/>
+              </a:ext>
+            </a:extLst>
+          </p:cNvPr>
           <p:cNvSpPr/>
           <p:nvPr/>
         </p:nvSpPr>
@@ -13559,7 +14200,13 @@
       </p:sp>
       <p:sp>
         <p:nvSpPr>
-          <p:cNvPr id="22" name="Evidence"/>
+          <p:cNvPr id="22" name="Evidence" descr="">
+            <a:extLst>
+              <a:ext uri="{C183D7F6-B498-43B3-948B-1728B52AA6E4}">
+                <adec:decorative xmlns:adec="http://schemas.microsoft.com/office/drawing/2017/decorative" val="1"/>
+              </a:ext>
+            </a:extLst>
+          </p:cNvPr>
           <p:cNvSpPr/>
           <p:nvPr/>
         </p:nvSpPr>
@@ -13593,7 +14240,13 @@
       </p:sp>
       <p:sp>
         <p:nvSpPr>
-          <p:cNvPr id="23" name="Icon FaFileShield"/>
+          <p:cNvPr id="23" name="Icon FaFileShield" descr="">
+            <a:extLst>
+              <a:ext uri="{C183D7F6-B498-43B3-948B-1728B52AA6E4}">
+                <adec:decorative xmlns:adec="http://schemas.microsoft.com/office/drawing/2017/decorative" val="1"/>
+              </a:ext>
+            </a:extLst>
+          </p:cNvPr>
           <p:cNvSpPr/>
           <p:nvPr/>
         </p:nvSpPr>
@@ -13618,7 +14271,13 @@
       </p:sp>
       <p:pic>
         <p:nvPicPr>
-          <p:cNvPr id="24" name="Image 0" descr="C:\Users\whale\git\mwb-b03\presentations\_build\icons\FaFileShield.png">    </p:cNvPr>
+          <p:cNvPr id="24" name="Image 0" descr="">
+            <a:extLst>
+              <a:ext uri="{C183D7F6-B498-43B3-948B-1728B52AA6E4}">
+                <adec:decorative xmlns:adec="http://schemas.microsoft.com/office/drawing/2017/decorative" val="1"/>
+              </a:ext>
+            </a:extLst>
+          </p:cNvPr>
           <p:cNvPicPr>
             <a:picLocks noChangeAspect="1"/>
           </p:cNvPicPr>
@@ -13777,9 +14436,9 @@
 </file>
 
 <file path=ppt/theme/theme1.xml><?xml version="1.0" encoding="utf-8"?>
-<a:theme xmlns:a="http://schemas.openxmlformats.org/drawingml/2006/main" name="Modernization Workbook">
+<a:theme xmlns:a="http://schemas.openxmlformats.org/drawingml/2006/main" name="Federal Modernization Workbook">
   <a:themeElements>
-    <a:clrScheme name="Modernization Workbook">
+    <a:clrScheme name="Federal Modernization Workbook">
       <a:dk1>
         <a:srgbClr val="1F2A44"/>
       </a:dk1>
@@ -13817,7 +14476,7 @@
         <a:srgbClr val="334155"/>
       </a:folHlink>
     </a:clrScheme>
-    <a:fontScheme name="Modernization Workbook">
+    <a:fontScheme name="Federal Modernization Workbook">
       <a:majorFont>
         <a:latin typeface="Cambria"/>
         <a:ea typeface=""/>
